--- a/presentations/Project_Capsule_Overview.pptx
+++ b/presentations/Project_Capsule_Overview.pptx
@@ -9112,7 +9112,7 @@
                   <a:srgbClr val="1B2838"/>
                 </a:solidFill>
               </a:rPr>
-              <a:t>A shift left is possible (you trust your users)!</a:t>
+              <a:t>A shift left is possible (you want to enable users)!</a:t>
             </a:r>
             <a:br>
               <a:rPr b="0" i="0" lang="en-US" sz="1320" u="none" cap="none" strike="noStrike">
@@ -10597,16 +10597,12 @@
               <a:buNone/>
             </a:pPr>
             <a:r>
-              <a:rPr b="1" i="0" lang="en-US" sz="1800" u="none" cap="none" strike="noStrike">
+              <a:rPr b="1" lang="en-US" sz="1800">
                 <a:solidFill>
                   <a:srgbClr val="173B63"/>
                 </a:solidFill>
-                <a:latin typeface="Arial"/>
-                <a:ea typeface="Arial"/>
-                <a:cs typeface="Arial"/>
-                <a:sym typeface="Arial"/>
               </a:rPr>
-              <a:t>Dev, test, and training fleets</a:t>
+              <a:t>Flexible Development environments</a:t>
             </a:r>
             <a:endParaRPr b="0" i="0" sz="1800" u="none" cap="none" strike="noStrike">
               <a:solidFill>
@@ -13023,7 +13019,7 @@
                   <a:srgbClr val="5A6B7B"/>
                 </a:solidFill>
               </a:rPr>
-              <a:t>We provide a demo environment based on Killederkoda allowing you to see Capsule in action</a:t>
+              <a:t>We provide a demo environment based on Killerkoda allowing you to see Capsule in action</a:t>
             </a:r>
             <a:endParaRPr b="0" i="0" sz="1450" u="none" cap="none" strike="noStrike">
               <a:solidFill>
@@ -13533,7 +13529,27 @@
                 <a:cs typeface="Arial"/>
                 <a:sym typeface="Arial"/>
               </a:rPr>
-              <a:t>Project Capsule — Overview</a:t>
+              <a:t>Project Capsule</a:t>
+            </a:r>
+            <a:r>
+              <a:rPr b="1" lang="en-US" sz="1500">
+                <a:solidFill>
+                  <a:srgbClr val="173B63"/>
+                </a:solidFill>
+              </a:rPr>
+              <a:t>,</a:t>
+            </a:r>
+            <a:r>
+              <a:rPr b="1" i="0" lang="en-US" sz="1500" u="none" cap="none" strike="noStrike">
+                <a:solidFill>
+                  <a:srgbClr val="173B63"/>
+                </a:solidFill>
+                <a:latin typeface="Arial"/>
+                <a:ea typeface="Arial"/>
+                <a:cs typeface="Arial"/>
+                <a:sym typeface="Arial"/>
+              </a:rPr>
+              <a:t> Overview</a:t>
             </a:r>
             <a:endParaRPr b="0" i="0" sz="1500" u="none" cap="none" strike="noStrike">
               <a:solidFill>
@@ -13717,7 +13733,27 @@
                 <a:cs typeface="Arial"/>
                 <a:sym typeface="Arial"/>
               </a:rPr>
-              <a:t>Project Capsule — Architecture</a:t>
+              <a:t>Project Capsule</a:t>
+            </a:r>
+            <a:r>
+              <a:rPr b="1" lang="en-US" sz="1500">
+                <a:solidFill>
+                  <a:srgbClr val="173B63"/>
+                </a:solidFill>
+              </a:rPr>
+              <a:t>,</a:t>
+            </a:r>
+            <a:r>
+              <a:rPr b="1" i="0" lang="en-US" sz="1500" u="none" cap="none" strike="noStrike">
+                <a:solidFill>
+                  <a:srgbClr val="173B63"/>
+                </a:solidFill>
+                <a:latin typeface="Arial"/>
+                <a:ea typeface="Arial"/>
+                <a:cs typeface="Arial"/>
+                <a:sym typeface="Arial"/>
+              </a:rPr>
+              <a:t> Architecture</a:t>
             </a:r>
             <a:endParaRPr b="0" i="0" sz="1500" u="none" cap="none" strike="noStrike">
               <a:solidFill>
@@ -13901,7 +13937,27 @@
                 <a:cs typeface="Arial"/>
                 <a:sym typeface="Arial"/>
               </a:rPr>
-              <a:t>Project Capsule — Rules</a:t>
+              <a:t>Project Capsule</a:t>
+            </a:r>
+            <a:r>
+              <a:rPr b="1" lang="en-US" sz="1500">
+                <a:solidFill>
+                  <a:srgbClr val="173B63"/>
+                </a:solidFill>
+              </a:rPr>
+              <a:t>,</a:t>
+            </a:r>
+            <a:r>
+              <a:rPr b="1" i="0" lang="en-US" sz="1500" u="none" cap="none" strike="noStrike">
+                <a:solidFill>
+                  <a:srgbClr val="173B63"/>
+                </a:solidFill>
+                <a:latin typeface="Arial"/>
+                <a:ea typeface="Arial"/>
+                <a:cs typeface="Arial"/>
+                <a:sym typeface="Arial"/>
+              </a:rPr>
+              <a:t> Rules</a:t>
             </a:r>
             <a:endParaRPr b="0" i="0" sz="1500" u="none" cap="none" strike="noStrike">
               <a:solidFill>
@@ -14085,7 +14141,27 @@
                 <a:cs typeface="Arial"/>
                 <a:sym typeface="Arial"/>
               </a:rPr>
-              <a:t>Project Capsule — Resource Management</a:t>
+              <a:t>Project Capsule</a:t>
+            </a:r>
+            <a:r>
+              <a:rPr b="1" lang="en-US" sz="1500">
+                <a:solidFill>
+                  <a:srgbClr val="173B63"/>
+                </a:solidFill>
+              </a:rPr>
+              <a:t>,</a:t>
+            </a:r>
+            <a:r>
+              <a:rPr b="1" i="0" lang="en-US" sz="1500" u="none" cap="none" strike="noStrike">
+                <a:solidFill>
+                  <a:srgbClr val="173B63"/>
+                </a:solidFill>
+                <a:latin typeface="Arial"/>
+                <a:ea typeface="Arial"/>
+                <a:cs typeface="Arial"/>
+                <a:sym typeface="Arial"/>
+              </a:rPr>
+              <a:t> Resource Management</a:t>
             </a:r>
             <a:endParaRPr b="0" i="0" sz="1500" u="none" cap="none" strike="noStrike">
               <a:solidFill>
@@ -14269,7 +14345,27 @@
                 <a:cs typeface="Arial"/>
                 <a:sym typeface="Arial"/>
               </a:rPr>
-              <a:t>Project Capsule — GitHub repository</a:t>
+              <a:t>Project Capsule</a:t>
+            </a:r>
+            <a:r>
+              <a:rPr b="1" lang="en-US" sz="1500">
+                <a:solidFill>
+                  <a:srgbClr val="173B63"/>
+                </a:solidFill>
+              </a:rPr>
+              <a:t>,</a:t>
+            </a:r>
+            <a:r>
+              <a:rPr b="1" i="0" lang="en-US" sz="1500" u="none" cap="none" strike="noStrike">
+                <a:solidFill>
+                  <a:srgbClr val="173B63"/>
+                </a:solidFill>
+                <a:latin typeface="Arial"/>
+                <a:ea typeface="Arial"/>
+                <a:cs typeface="Arial"/>
+                <a:sym typeface="Arial"/>
+              </a:rPr>
+              <a:t> GitHub repository</a:t>
             </a:r>
             <a:endParaRPr b="0" i="0" sz="1500" u="none" cap="none" strike="noStrike">
               <a:solidFill>
@@ -14453,7 +14549,27 @@
                 <a:cs typeface="Arial"/>
                 <a:sym typeface="Arial"/>
               </a:rPr>
-              <a:t>Kubernetes documentation — Multi-tenancy</a:t>
+              <a:t>Kubernetes documentation</a:t>
+            </a:r>
+            <a:r>
+              <a:rPr b="1" lang="en-US" sz="1500">
+                <a:solidFill>
+                  <a:srgbClr val="173B63"/>
+                </a:solidFill>
+              </a:rPr>
+              <a:t>,</a:t>
+            </a:r>
+            <a:r>
+              <a:rPr b="1" i="0" lang="en-US" sz="1500" u="none" cap="none" strike="noStrike">
+                <a:solidFill>
+                  <a:srgbClr val="173B63"/>
+                </a:solidFill>
+                <a:latin typeface="Arial"/>
+                <a:ea typeface="Arial"/>
+                <a:cs typeface="Arial"/>
+                <a:sym typeface="Arial"/>
+              </a:rPr>
+              <a:t> Multi-tenancy</a:t>
             </a:r>
             <a:endParaRPr b="0" i="0" sz="1500" u="none" cap="none" strike="noStrike">
               <a:solidFill>
@@ -16432,7 +16548,7 @@
             <a:tbl>
               <a:tblPr>
                 <a:noFill/>
-                <a:tableStyleId>{4349A070-70BF-4F81-B11C-67EF7CC576FB}</a:tableStyleId>
+                <a:tableStyleId>{ED635552-BB23-47AC-BD4D-7ACD15CD4ADE}</a:tableStyleId>
               </a:tblPr>
               <a:tblGrid>
                 <a:gridCol w="1938525"/>
@@ -17764,7 +17880,7 @@
                           <a:cs typeface="Arial"/>
                           <a:sym typeface="Arial"/>
                         </a:rPr>
-                        <a:t>Medium–high</a:t>
+                        <a:t>Medium</a:t>
                       </a:r>
                       <a:endParaRPr sz="1320" u="none" cap="none" strike="noStrike">
                         <a:latin typeface="Arial"/>
@@ -18320,16 +18436,12 @@
                         <a:buNone/>
                       </a:pPr>
                       <a:r>
-                        <a:rPr lang="en-US" sz="1320" u="none" cap="none" strike="noStrike">
+                        <a:rPr lang="en-US" sz="1320">
                           <a:solidFill>
                             <a:srgbClr val="1B2838"/>
                           </a:solidFill>
-                          <a:latin typeface="Arial"/>
-                          <a:ea typeface="Arial"/>
-                          <a:cs typeface="Arial"/>
-                          <a:sym typeface="Arial"/>
                         </a:rPr>
-                        <a:t>Limited by backend</a:t>
+                        <a:t>Medium</a:t>
                       </a:r>
                       <a:endParaRPr sz="1320" u="none" cap="none" strike="noStrike">
                         <a:latin typeface="Arial"/>
@@ -18736,7 +18848,7 @@
                           <a:cs typeface="Arial"/>
                           <a:sym typeface="Arial"/>
                         </a:rPr>
-                        <a:t>Low initially</a:t>
+                        <a:t>Low</a:t>
                       </a:r>
                       <a:endParaRPr sz="1320" u="none" cap="none" strike="noStrike">
                         <a:latin typeface="Arial"/>
@@ -19224,7 +19336,7 @@
                           <a:cs typeface="Arial"/>
                           <a:sym typeface="Arial"/>
                         </a:rPr>
-                        <a:t>Low–medium</a:t>
+                        <a:t>Low</a:t>
                       </a:r>
                       <a:endParaRPr sz="1320" u="none" cap="none" strike="noStrike">
                         <a:latin typeface="Arial"/>
@@ -19301,7 +19413,7 @@
                             <a:srgbClr val="1B2838"/>
                           </a:solidFill>
                         </a:rPr>
-                        <a:t>Low</a:t>
+                        <a:t>Medium</a:t>
                       </a:r>
                       <a:endParaRPr sz="1320" u="none" cap="none" strike="noStrike">
                         <a:latin typeface="Arial"/>
@@ -25567,7 +25679,27 @@
                 <a:cs typeface="Arial"/>
                 <a:sym typeface="Arial"/>
               </a:rPr>
-              <a:t>Standard CRDs, admission, and reconciliation—no API-server fork and no custom client required.</a:t>
+              <a:t>Standard CRDs, admission, and reconciliation</a:t>
+            </a:r>
+            <a:r>
+              <a:rPr lang="en-US" sz="1450">
+                <a:solidFill>
+                  <a:srgbClr val="5A6B7B"/>
+                </a:solidFill>
+              </a:rPr>
+              <a:t>, </a:t>
+            </a:r>
+            <a:r>
+              <a:rPr b="0" i="0" lang="en-US" sz="1450" u="none" cap="none" strike="noStrike">
+                <a:solidFill>
+                  <a:srgbClr val="5A6B7B"/>
+                </a:solidFill>
+                <a:latin typeface="Arial"/>
+                <a:ea typeface="Arial"/>
+                <a:cs typeface="Arial"/>
+                <a:sym typeface="Arial"/>
+              </a:rPr>
+              <a:t>no API-server fork and no custom client required.</a:t>
             </a:r>
             <a:endParaRPr b="0" i="0" sz="1450" u="none" cap="none" strike="noStrike">
               <a:solidFill>
@@ -30936,7 +31068,27 @@
                 <a:cs typeface="Arial"/>
                 <a:sym typeface="Arial"/>
               </a:rPr>
-              <a:t>Create namespaces freely—without accidentally multiplying the tenant’s capacity.</a:t>
+              <a:t>Create namespaces freely</a:t>
+            </a:r>
+            <a:r>
+              <a:rPr b="1" lang="en-US" sz="1280">
+                <a:solidFill>
+                  <a:srgbClr val="173B63"/>
+                </a:solidFill>
+              </a:rPr>
+              <a:t> </a:t>
+            </a:r>
+            <a:r>
+              <a:rPr b="1" i="0" lang="en-US" sz="1280">
+                <a:solidFill>
+                  <a:srgbClr val="173B63"/>
+                </a:solidFill>
+                <a:latin typeface="Arial"/>
+                <a:ea typeface="Arial"/>
+                <a:cs typeface="Arial"/>
+                <a:sym typeface="Arial"/>
+              </a:rPr>
+              <a:t>without accidentally multiplying the tenant’s capacity.</a:t>
             </a:r>
             <a:endParaRPr/>
           </a:p>
@@ -32698,17 +32850,26 @@
               <a:buNone/>
             </a:pPr>
             <a:r>
-              <a:t/>
-            </a:r>
-            <a:endParaRPr sz="1800">
-              <a:solidFill>
-                <a:srgbClr val="000000"/>
-              </a:solidFill>
-              <a:latin typeface="Arial"/>
-              <a:ea typeface="Arial"/>
-              <a:cs typeface="Arial"/>
-              <a:sym typeface="Arial"/>
-            </a:endParaRPr>
+              <a:rPr lang="en-US" sz="1800"/>
+              <a:t>.</a:t>
+            </a:r>
+            <a:endParaRPr sz="1800"/>
+          </a:p>
+          <a:p>
+            <a:pPr indent="0" lvl="0" marL="0" marR="0" rtl="0" algn="ctr">
+              <a:spcBef>
+                <a:spcPts val="0"/>
+              </a:spcBef>
+              <a:spcAft>
+                <a:spcPts val="0"/>
+              </a:spcAft>
+              <a:buNone/>
+            </a:pPr>
+            <a:r>
+              <a:rPr lang="en-US" sz="1800"/>
+              <a:t>6</a:t>
+            </a:r>
+            <a:endParaRPr sz="1800"/>
           </a:p>
         </p:txBody>
       </p:sp>
@@ -33217,8 +33378,8 @@
         </p:nvSpPr>
         <p:spPr>
           <a:xfrm>
-            <a:off x="5711959" y="4041606"/>
-            <a:ext cx="1243500" cy="141600"/>
+            <a:off x="5711950" y="4041600"/>
+            <a:ext cx="1152000" cy="141600"/>
           </a:xfrm>
           <a:prstGeom prst="rect">
             <a:avLst/>
@@ -33256,7 +33417,7 @@
                 <a:cs typeface="Arial"/>
                 <a:sym typeface="Arial"/>
               </a:rPr>
-              <a:t>—  Excluded</a:t>
+              <a:t>  Excluded</a:t>
             </a:r>
             <a:endParaRPr/>
           </a:p>
